--- a/neerlandais1/powerpoints/Module_9_Zinnen_verbinden.pptx
+++ b/neerlandais1/powerpoints/Module_9_Zinnen_verbinden.pptx
@@ -132,19 +132,19 @@
   <p:extLst>
     <p:ext uri="{521415D9-36F7-43E2-AB2F-B90AF26B5E84}">
       <p14:sectionLst xmlns:p14="http://schemas.microsoft.com/office/powerpoint/2010/main">
-        <p14:section name="Ouverture" id="{52feab23-fb03-c3d4-e78f-4e8062453aa8}">
+        <p14:section name="Ouverture" id="{7b04fc9e-dd59-0969-3ff4-d183d2da0079}">
           <p14:sldIdLst>
             <p14:sldId id="256"/>
           </p14:sldIdLst>
         </p14:section>
-        <p14:section name="Découvrir" id="{02e301b4-aaf9-27a0-1352-32d19a984296}">
+        <p14:section name="Découvrir" id="{427dbcc8-eb7b-761a-6a40-8ed6236b1848}">
           <p14:sldIdLst>
             <p14:sldId id="257"/>
             <p14:sldId id="258"/>
             <p14:sldId id="259"/>
           </p14:sldIdLst>
         </p14:section>
-        <p14:section name="Comprendre" id="{8c865f39-493b-71f3-e3d7-0c342246b3f0}">
+        <p14:section name="Comprendre" id="{15a4aecc-ab5e-626d-8b5f-4918908e79c7}">
           <p14:sldIdLst>
             <p14:sldId id="260"/>
             <p14:sldId id="261"/>
@@ -158,7 +158,7 @@
             <p14:sldId id="269"/>
           </p14:sldIdLst>
         </p14:section>
-        <p14:section name="JIJ NU ! — Oefeningen" id="{58acda19-be83-8fec-704b-916c7bf44a30}">
+        <p14:section name="JIJ NU ! — Oefeningen" id="{ff988d08-aa11-d1b1-348a-fedb3971a810}">
           <p14:sldIdLst>
             <p14:sldId id="270"/>
             <p14:sldId id="271"/>
@@ -173,7 +173,7 @@
             <p14:sldId id="280"/>
           </p14:sldIdLst>
         </p14:section>
-        <p14:section name="Clôture" id="{3724107f-dfcf-e933-632e-012a53a856ea}">
+        <p14:section name="Clôture" id="{f2c1207e-129b-9d3f-914e-5b8de2eaf29c}">
           <p14:sldIdLst>
             <p14:sldId id="281"/>
           </p14:sldIdLst>
@@ -3718,7 +3718,7 @@
                   <a:srgbClr val="FFFFFF"/>
                 </a:solidFill>
               </a:rPr>
-              <a:t>MODULE 9 / 10</a:t>
+              <a:t>MODULE 9 / 15</a:t>
             </a:r>
             <a:endParaRPr lang="en-US" sz="1400" dirty="0"/>
           </a:p>

--- a/neerlandais1/powerpoints/Module_9_Zinnen_verbinden.pptx
+++ b/neerlandais1/powerpoints/Module_9_Zinnen_verbinden.pptx
@@ -132,19 +132,19 @@
   <p:extLst>
     <p:ext uri="{521415D9-36F7-43E2-AB2F-B90AF26B5E84}">
       <p14:sectionLst xmlns:p14="http://schemas.microsoft.com/office/powerpoint/2010/main">
-        <p14:section name="Ouverture" id="{7b04fc9e-dd59-0969-3ff4-d183d2da0079}">
+        <p14:section name="Ouverture" id="{328cd6f3-1416-2697-e527-0b7654dd15a2}">
           <p14:sldIdLst>
             <p14:sldId id="256"/>
           </p14:sldIdLst>
         </p14:section>
-        <p14:section name="Découvrir" id="{427dbcc8-eb7b-761a-6a40-8ed6236b1848}">
+        <p14:section name="Découvrir" id="{fe49b3cc-53be-e96a-2527-b6a3a24e5723}">
           <p14:sldIdLst>
             <p14:sldId id="257"/>
             <p14:sldId id="258"/>
             <p14:sldId id="259"/>
           </p14:sldIdLst>
         </p14:section>
-        <p14:section name="Comprendre" id="{15a4aecc-ab5e-626d-8b5f-4918908e79c7}">
+        <p14:section name="Comprendre" id="{42cc3ecd-d04c-8f0c-1444-d891f9eaceb9}">
           <p14:sldIdLst>
             <p14:sldId id="260"/>
             <p14:sldId id="261"/>
@@ -158,7 +158,7 @@
             <p14:sldId id="269"/>
           </p14:sldIdLst>
         </p14:section>
-        <p14:section name="JIJ NU ! — Oefeningen" id="{ff988d08-aa11-d1b1-348a-fedb3971a810}">
+        <p14:section name="JIJ NU ! — Oefeningen" id="{509ee172-a88f-127e-908a-540a62e7dda0}">
           <p14:sldIdLst>
             <p14:sldId id="270"/>
             <p14:sldId id="271"/>
@@ -173,7 +173,7 @@
             <p14:sldId id="280"/>
           </p14:sldIdLst>
         </p14:section>
-        <p14:section name="Clôture" id="{f2c1207e-129b-9d3f-914e-5b8de2eaf29c}">
+        <p14:section name="Clôture" id="{5e2ff609-75e8-12f8-376a-9774080cbb4f}">
           <p14:sldIdLst>
             <p14:sldId id="281"/>
           </p14:sldIdLst>
@@ -3718,7 +3718,7 @@
                   <a:srgbClr val="FFFFFF"/>
                 </a:solidFill>
               </a:rPr>
-              <a:t>MODULE 9 / 15</a:t>
+              <a:t>MODULE 9 / 19</a:t>
             </a:r>
             <a:endParaRPr lang="en-US" sz="1400" dirty="0"/>
           </a:p>

--- a/neerlandais1/powerpoints/Module_9_Zinnen_verbinden.pptx
+++ b/neerlandais1/powerpoints/Module_9_Zinnen_verbinden.pptx
@@ -132,19 +132,19 @@
   <p:extLst>
     <p:ext uri="{521415D9-36F7-43E2-AB2F-B90AF26B5E84}">
       <p14:sectionLst xmlns:p14="http://schemas.microsoft.com/office/powerpoint/2010/main">
-        <p14:section name="Ouverture" id="{328cd6f3-1416-2697-e527-0b7654dd15a2}">
+        <p14:section name="Ouverture" id="{5146538f-f97c-cdaf-e77a-586892bd660e}">
           <p14:sldIdLst>
             <p14:sldId id="256"/>
           </p14:sldIdLst>
         </p14:section>
-        <p14:section name="Découvrir" id="{fe49b3cc-53be-e96a-2527-b6a3a24e5723}">
+        <p14:section name="Découvrir" id="{b7ab6b44-5ded-d2c7-6220-4260eb310599}">
           <p14:sldIdLst>
             <p14:sldId id="257"/>
             <p14:sldId id="258"/>
             <p14:sldId id="259"/>
           </p14:sldIdLst>
         </p14:section>
-        <p14:section name="Comprendre" id="{42cc3ecd-d04c-8f0c-1444-d891f9eaceb9}">
+        <p14:section name="Comprendre" id="{81dee009-f554-3ecf-81ca-cc0a72e725db}">
           <p14:sldIdLst>
             <p14:sldId id="260"/>
             <p14:sldId id="261"/>
@@ -158,7 +158,7 @@
             <p14:sldId id="269"/>
           </p14:sldIdLst>
         </p14:section>
-        <p14:section name="JIJ NU ! — Oefeningen" id="{509ee172-a88f-127e-908a-540a62e7dda0}">
+        <p14:section name="JIJ NU ! — Oefeningen" id="{86d249ff-7960-9f0b-d7a8-4accbb353cdb}">
           <p14:sldIdLst>
             <p14:sldId id="270"/>
             <p14:sldId id="271"/>
@@ -173,7 +173,7 @@
             <p14:sldId id="280"/>
           </p14:sldIdLst>
         </p14:section>
-        <p14:section name="Clôture" id="{5e2ff609-75e8-12f8-376a-9774080cbb4f}">
+        <p14:section name="Clôture" id="{bd6015a6-f048-e7e9-8da9-f02da286b739}">
           <p14:sldIdLst>
             <p14:sldId id="281"/>
           </p14:sldIdLst>
@@ -3718,7 +3718,7 @@
                   <a:srgbClr val="FFFFFF"/>
                 </a:solidFill>
               </a:rPr>
-              <a:t>MODULE 9 / 19</a:t>
+              <a:t>MODULE 9 / 24</a:t>
             </a:r>
             <a:endParaRPr lang="en-US" sz="1400" dirty="0"/>
           </a:p>

--- a/neerlandais1/powerpoints/Module_9_Zinnen_verbinden.pptx
+++ b/neerlandais1/powerpoints/Module_9_Zinnen_verbinden.pptx
@@ -132,19 +132,19 @@
   <p:extLst>
     <p:ext uri="{521415D9-36F7-43E2-AB2F-B90AF26B5E84}">
       <p14:sectionLst xmlns:p14="http://schemas.microsoft.com/office/powerpoint/2010/main">
-        <p14:section name="Ouverture" id="{5146538f-f97c-cdaf-e77a-586892bd660e}">
+        <p14:section name="Ouverture" id="{3d043851-478e-3583-077d-a112455febd4}">
           <p14:sldIdLst>
             <p14:sldId id="256"/>
           </p14:sldIdLst>
         </p14:section>
-        <p14:section name="Découvrir" id="{b7ab6b44-5ded-d2c7-6220-4260eb310599}">
+        <p14:section name="Découvrir" id="{3626907b-ea87-716d-2cfe-686abf03b831}">
           <p14:sldIdLst>
             <p14:sldId id="257"/>
             <p14:sldId id="258"/>
             <p14:sldId id="259"/>
           </p14:sldIdLst>
         </p14:section>
-        <p14:section name="Comprendre" id="{81dee009-f554-3ecf-81ca-cc0a72e725db}">
+        <p14:section name="Comprendre" id="{ef3d5379-48b5-0f11-2059-730f766d02dd}">
           <p14:sldIdLst>
             <p14:sldId id="260"/>
             <p14:sldId id="261"/>
@@ -158,7 +158,7 @@
             <p14:sldId id="269"/>
           </p14:sldIdLst>
         </p14:section>
-        <p14:section name="JIJ NU ! — Oefeningen" id="{86d249ff-7960-9f0b-d7a8-4accbb353cdb}">
+        <p14:section name="JIJ NU ! — Oefeningen" id="{8b51cde2-41db-7117-a8e9-b3ac7b04d794}">
           <p14:sldIdLst>
             <p14:sldId id="270"/>
             <p14:sldId id="271"/>
@@ -173,7 +173,7 @@
             <p14:sldId id="280"/>
           </p14:sldIdLst>
         </p14:section>
-        <p14:section name="Clôture" id="{bd6015a6-f048-e7e9-8da9-f02da286b739}">
+        <p14:section name="Clôture" id="{28122274-959e-8e8d-3026-4e1b65afd741}">
           <p14:sldIdLst>
             <p14:sldId id="281"/>
           </p14:sldIdLst>
@@ -3718,7 +3718,7 @@
                   <a:srgbClr val="FFFFFF"/>
                 </a:solidFill>
               </a:rPr>
-              <a:t>MODULE 9 / 24</a:t>
+              <a:t>MODULE 9 / 29</a:t>
             </a:r>
             <a:endParaRPr lang="en-US" sz="1400" dirty="0"/>
           </a:p>

--- a/neerlandais1/powerpoints/Module_9_Zinnen_verbinden.pptx
+++ b/neerlandais1/powerpoints/Module_9_Zinnen_verbinden.pptx
@@ -132,19 +132,19 @@
   <p:extLst>
     <p:ext uri="{521415D9-36F7-43E2-AB2F-B90AF26B5E84}">
       <p14:sectionLst xmlns:p14="http://schemas.microsoft.com/office/powerpoint/2010/main">
-        <p14:section name="Ouverture" id="{3d043851-478e-3583-077d-a112455febd4}">
+        <p14:section name="Ouverture" id="{bc0bbf3a-4d09-cc59-6fd1-967d5c927638}">
           <p14:sldIdLst>
             <p14:sldId id="256"/>
           </p14:sldIdLst>
         </p14:section>
-        <p14:section name="Découvrir" id="{3626907b-ea87-716d-2cfe-686abf03b831}">
+        <p14:section name="Découvrir" id="{b60edba3-0380-7e82-6d80-84b96fd05749}">
           <p14:sldIdLst>
             <p14:sldId id="257"/>
             <p14:sldId id="258"/>
             <p14:sldId id="259"/>
           </p14:sldIdLst>
         </p14:section>
-        <p14:section name="Comprendre" id="{ef3d5379-48b5-0f11-2059-730f766d02dd}">
+        <p14:section name="Comprendre" id="{b31cee6f-597f-a0e4-aec8-2d09db95f77f}">
           <p14:sldIdLst>
             <p14:sldId id="260"/>
             <p14:sldId id="261"/>
@@ -158,7 +158,7 @@
             <p14:sldId id="269"/>
           </p14:sldIdLst>
         </p14:section>
-        <p14:section name="JIJ NU ! — Oefeningen" id="{8b51cde2-41db-7117-a8e9-b3ac7b04d794}">
+        <p14:section name="JIJ NU ! — Oefeningen" id="{80c19e69-8b60-1365-6d9e-fec0600d95b0}">
           <p14:sldIdLst>
             <p14:sldId id="270"/>
             <p14:sldId id="271"/>
@@ -173,7 +173,7 @@
             <p14:sldId id="280"/>
           </p14:sldIdLst>
         </p14:section>
-        <p14:section name="Clôture" id="{28122274-959e-8e8d-3026-4e1b65afd741}">
+        <p14:section name="Clôture" id="{8a37b881-3357-7d7d-f37b-f2f56066763b}">
           <p14:sldIdLst>
             <p14:sldId id="281"/>
           </p14:sldIdLst>
@@ -3718,7 +3718,7 @@
                   <a:srgbClr val="FFFFFF"/>
                 </a:solidFill>
               </a:rPr>
-              <a:t>MODULE 9 / 29</a:t>
+              <a:t>MODULE 9 / 32</a:t>
             </a:r>
             <a:endParaRPr lang="en-US" sz="1400" dirty="0"/>
           </a:p>

--- a/neerlandais1/powerpoints/Module_9_Zinnen_verbinden.pptx
+++ b/neerlandais1/powerpoints/Module_9_Zinnen_verbinden.pptx
@@ -132,19 +132,19 @@
   <p:extLst>
     <p:ext uri="{521415D9-36F7-43E2-AB2F-B90AF26B5E84}">
       <p14:sectionLst xmlns:p14="http://schemas.microsoft.com/office/powerpoint/2010/main">
-        <p14:section name="Ouverture" id="{bc0bbf3a-4d09-cc59-6fd1-967d5c927638}">
+        <p14:section name="Ouverture" id="{b5b9a35a-96bb-d5be-ee8b-17b11a0706b4}">
           <p14:sldIdLst>
             <p14:sldId id="256"/>
           </p14:sldIdLst>
         </p14:section>
-        <p14:section name="Découvrir" id="{b60edba3-0380-7e82-6d80-84b96fd05749}">
+        <p14:section name="Découvrir" id="{4db03fc1-19e0-97bb-82be-8fdef2d50af2}">
           <p14:sldIdLst>
             <p14:sldId id="257"/>
             <p14:sldId id="258"/>
             <p14:sldId id="259"/>
           </p14:sldIdLst>
         </p14:section>
-        <p14:section name="Comprendre" id="{b31cee6f-597f-a0e4-aec8-2d09db95f77f}">
+        <p14:section name="Comprendre" id="{ff4172a8-9a26-23db-39c2-8b24003d94f0}">
           <p14:sldIdLst>
             <p14:sldId id="260"/>
             <p14:sldId id="261"/>
@@ -158,7 +158,7 @@
             <p14:sldId id="269"/>
           </p14:sldIdLst>
         </p14:section>
-        <p14:section name="JIJ NU ! — Oefeningen" id="{80c19e69-8b60-1365-6d9e-fec0600d95b0}">
+        <p14:section name="JIJ NU ! — Oefeningen" id="{979ad7a7-dcb8-885d-727a-809bf3a3abbc}">
           <p14:sldIdLst>
             <p14:sldId id="270"/>
             <p14:sldId id="271"/>
@@ -173,7 +173,7 @@
             <p14:sldId id="280"/>
           </p14:sldIdLst>
         </p14:section>
-        <p14:section name="Clôture" id="{8a37b881-3357-7d7d-f37b-f2f56066763b}">
+        <p14:section name="Clôture" id="{44a0a608-2fef-864e-9c21-c4c411db435d}">
           <p14:sldIdLst>
             <p14:sldId id="281"/>
           </p14:sldIdLst>

--- a/neerlandais1/powerpoints/Module_9_Zinnen_verbinden.pptx
+++ b/neerlandais1/powerpoints/Module_9_Zinnen_verbinden.pptx
@@ -132,19 +132,19 @@
   <p:extLst>
     <p:ext uri="{521415D9-36F7-43E2-AB2F-B90AF26B5E84}">
       <p14:sectionLst xmlns:p14="http://schemas.microsoft.com/office/powerpoint/2010/main">
-        <p14:section name="Ouverture" id="{b5b9a35a-96bb-d5be-ee8b-17b11a0706b4}">
+        <p14:section name="Ouverture" id="{5120d5a5-5374-6109-aa5c-606e5b48f97d}">
           <p14:sldIdLst>
             <p14:sldId id="256"/>
           </p14:sldIdLst>
         </p14:section>
-        <p14:section name="Découvrir" id="{4db03fc1-19e0-97bb-82be-8fdef2d50af2}">
+        <p14:section name="Découvrir" id="{9ca9f72a-a7cf-a201-89b1-1c4832d9b955}">
           <p14:sldIdLst>
             <p14:sldId id="257"/>
             <p14:sldId id="258"/>
             <p14:sldId id="259"/>
           </p14:sldIdLst>
         </p14:section>
-        <p14:section name="Comprendre" id="{ff4172a8-9a26-23db-39c2-8b24003d94f0}">
+        <p14:section name="Comprendre" id="{129e8617-323e-54e0-b4b3-fefb56c44497}">
           <p14:sldIdLst>
             <p14:sldId id="260"/>
             <p14:sldId id="261"/>
@@ -158,7 +158,7 @@
             <p14:sldId id="269"/>
           </p14:sldIdLst>
         </p14:section>
-        <p14:section name="JIJ NU ! — Oefeningen" id="{979ad7a7-dcb8-885d-727a-809bf3a3abbc}">
+        <p14:section name="JIJ NU ! — Oefeningen" id="{8628378f-d9bb-c165-982e-f5f692ba5410}">
           <p14:sldIdLst>
             <p14:sldId id="270"/>
             <p14:sldId id="271"/>
@@ -173,7 +173,7 @@
             <p14:sldId id="280"/>
           </p14:sldIdLst>
         </p14:section>
-        <p14:section name="Clôture" id="{44a0a608-2fef-864e-9c21-c4c411db435d}">
+        <p14:section name="Clôture" id="{e57d8b6c-cb96-270b-e299-b7bd156fd769}">
           <p14:sldIdLst>
             <p14:sldId id="281"/>
           </p14:sldIdLst>

--- a/neerlandais1/powerpoints/Module_9_Zinnen_verbinden.pptx
+++ b/neerlandais1/powerpoints/Module_9_Zinnen_verbinden.pptx
@@ -132,19 +132,19 @@
   <p:extLst>
     <p:ext uri="{521415D9-36F7-43E2-AB2F-B90AF26B5E84}">
       <p14:sectionLst xmlns:p14="http://schemas.microsoft.com/office/powerpoint/2010/main">
-        <p14:section name="Ouverture" id="{5120d5a5-5374-6109-aa5c-606e5b48f97d}">
+        <p14:section name="Ouverture" id="{1a792ef3-5c4a-c536-989b-df7d440f6756}">
           <p14:sldIdLst>
             <p14:sldId id="256"/>
           </p14:sldIdLst>
         </p14:section>
-        <p14:section name="Découvrir" id="{9ca9f72a-a7cf-a201-89b1-1c4832d9b955}">
+        <p14:section name="Découvrir" id="{3d33a241-98b9-30d4-86ce-b57051057492}">
           <p14:sldIdLst>
             <p14:sldId id="257"/>
             <p14:sldId id="258"/>
             <p14:sldId id="259"/>
           </p14:sldIdLst>
         </p14:section>
-        <p14:section name="Comprendre" id="{129e8617-323e-54e0-b4b3-fefb56c44497}">
+        <p14:section name="Comprendre" id="{d5f9d3d1-447c-ab65-ee28-5b25dccb6853}">
           <p14:sldIdLst>
             <p14:sldId id="260"/>
             <p14:sldId id="261"/>
@@ -158,7 +158,7 @@
             <p14:sldId id="269"/>
           </p14:sldIdLst>
         </p14:section>
-        <p14:section name="JIJ NU ! — Oefeningen" id="{8628378f-d9bb-c165-982e-f5f692ba5410}">
+        <p14:section name="JIJ NU ! — Oefeningen" id="{8bde6e1f-8691-064b-3324-4c0f6b44714e}">
           <p14:sldIdLst>
             <p14:sldId id="270"/>
             <p14:sldId id="271"/>
@@ -173,7 +173,7 @@
             <p14:sldId id="280"/>
           </p14:sldIdLst>
         </p14:section>
-        <p14:section name="Clôture" id="{e57d8b6c-cb96-270b-e299-b7bd156fd769}">
+        <p14:section name="Clôture" id="{044a1669-6859-1f3b-ff6d-c1e7387fe25d}">
           <p14:sldIdLst>
             <p14:sldId id="281"/>
           </p14:sldIdLst>

--- a/neerlandais1/powerpoints/Module_9_Zinnen_verbinden.pptx
+++ b/neerlandais1/powerpoints/Module_9_Zinnen_verbinden.pptx
@@ -132,19 +132,19 @@
   <p:extLst>
     <p:ext uri="{521415D9-36F7-43E2-AB2F-B90AF26B5E84}">
       <p14:sectionLst xmlns:p14="http://schemas.microsoft.com/office/powerpoint/2010/main">
-        <p14:section name="Ouverture" id="{1a792ef3-5c4a-c536-989b-df7d440f6756}">
+        <p14:section name="Ouverture" id="{aea00932-0a06-e1a1-cecb-e64bbf68f8c7}">
           <p14:sldIdLst>
             <p14:sldId id="256"/>
           </p14:sldIdLst>
         </p14:section>
-        <p14:section name="Découvrir" id="{3d33a241-98b9-30d4-86ce-b57051057492}">
+        <p14:section name="Découvrir" id="{5988e563-844f-ca94-4085-630e7c51e03e}">
           <p14:sldIdLst>
             <p14:sldId id="257"/>
             <p14:sldId id="258"/>
             <p14:sldId id="259"/>
           </p14:sldIdLst>
         </p14:section>
-        <p14:section name="Comprendre" id="{d5f9d3d1-447c-ab65-ee28-5b25dccb6853}">
+        <p14:section name="Comprendre" id="{d624dfa3-2966-07e3-fe1f-e5295a79a1dc}">
           <p14:sldIdLst>
             <p14:sldId id="260"/>
             <p14:sldId id="261"/>
@@ -158,7 +158,7 @@
             <p14:sldId id="269"/>
           </p14:sldIdLst>
         </p14:section>
-        <p14:section name="JIJ NU ! — Oefeningen" id="{8bde6e1f-8691-064b-3324-4c0f6b44714e}">
+        <p14:section name="JIJ NU ! — Oefeningen" id="{7473b17d-fdcc-1b4d-9667-f628eab59302}">
           <p14:sldIdLst>
             <p14:sldId id="270"/>
             <p14:sldId id="271"/>
@@ -173,7 +173,7 @@
             <p14:sldId id="280"/>
           </p14:sldIdLst>
         </p14:section>
-        <p14:section name="Clôture" id="{044a1669-6859-1f3b-ff6d-c1e7387fe25d}">
+        <p14:section name="Clôture" id="{68b8e7ff-3ec7-a37d-7d25-46e1bb6c688b}">
           <p14:sldIdLst>
             <p14:sldId id="281"/>
           </p14:sldIdLst>

--- a/neerlandais1/powerpoints/Module_9_Zinnen_verbinden.pptx
+++ b/neerlandais1/powerpoints/Module_9_Zinnen_verbinden.pptx
@@ -132,19 +132,19 @@
   <p:extLst>
     <p:ext uri="{521415D9-36F7-43E2-AB2F-B90AF26B5E84}">
       <p14:sectionLst xmlns:p14="http://schemas.microsoft.com/office/powerpoint/2010/main">
-        <p14:section name="Ouverture" id="{aea00932-0a06-e1a1-cecb-e64bbf68f8c7}">
+        <p14:section name="Ouverture" id="{384cf9f4-e289-20a3-39e0-fd00ff2e4056}">
           <p14:sldIdLst>
             <p14:sldId id="256"/>
           </p14:sldIdLst>
         </p14:section>
-        <p14:section name="Découvrir" id="{5988e563-844f-ca94-4085-630e7c51e03e}">
+        <p14:section name="Découvrir" id="{d1271ed2-c06e-18e5-c607-e3727959e1c9}">
           <p14:sldIdLst>
             <p14:sldId id="257"/>
             <p14:sldId id="258"/>
             <p14:sldId id="259"/>
           </p14:sldIdLst>
         </p14:section>
-        <p14:section name="Comprendre" id="{d624dfa3-2966-07e3-fe1f-e5295a79a1dc}">
+        <p14:section name="Comprendre" id="{832ac3ed-19d0-2495-1b6a-29785388bce0}">
           <p14:sldIdLst>
             <p14:sldId id="260"/>
             <p14:sldId id="261"/>
@@ -158,7 +158,7 @@
             <p14:sldId id="269"/>
           </p14:sldIdLst>
         </p14:section>
-        <p14:section name="JIJ NU ! — Oefeningen" id="{7473b17d-fdcc-1b4d-9667-f628eab59302}">
+        <p14:section name="JIJ NU ! — Oefeningen" id="{30a6b1a9-e04a-810f-f711-4d65f549280d}">
           <p14:sldIdLst>
             <p14:sldId id="270"/>
             <p14:sldId id="271"/>
@@ -173,7 +173,7 @@
             <p14:sldId id="280"/>
           </p14:sldIdLst>
         </p14:section>
-        <p14:section name="Clôture" id="{68b8e7ff-3ec7-a37d-7d25-46e1bb6c688b}">
+        <p14:section name="Clôture" id="{3aa2e2a9-be5d-2076-99e0-d288c95dc4dc}">
           <p14:sldIdLst>
             <p14:sldId id="281"/>
           </p14:sldIdLst>

--- a/neerlandais1/powerpoints/Module_9_Zinnen_verbinden.pptx
+++ b/neerlandais1/powerpoints/Module_9_Zinnen_verbinden.pptx
@@ -132,19 +132,19 @@
   <p:extLst>
     <p:ext uri="{521415D9-36F7-43E2-AB2F-B90AF26B5E84}">
       <p14:sectionLst xmlns:p14="http://schemas.microsoft.com/office/powerpoint/2010/main">
-        <p14:section name="Ouverture" id="{384cf9f4-e289-20a3-39e0-fd00ff2e4056}">
+        <p14:section name="Ouverture" id="{5bfdc3f8-8f29-b8af-bc40-be1f10d40ae2}">
           <p14:sldIdLst>
             <p14:sldId id="256"/>
           </p14:sldIdLst>
         </p14:section>
-        <p14:section name="Découvrir" id="{d1271ed2-c06e-18e5-c607-e3727959e1c9}">
+        <p14:section name="Découvrir" id="{f47c38b3-982d-127e-9293-c38a01bf1ae6}">
           <p14:sldIdLst>
             <p14:sldId id="257"/>
             <p14:sldId id="258"/>
             <p14:sldId id="259"/>
           </p14:sldIdLst>
         </p14:section>
-        <p14:section name="Comprendre" id="{832ac3ed-19d0-2495-1b6a-29785388bce0}">
+        <p14:section name="Comprendre" id="{3ff861a7-fc8a-9b53-b17e-9eacc4d44646}">
           <p14:sldIdLst>
             <p14:sldId id="260"/>
             <p14:sldId id="261"/>
@@ -158,7 +158,7 @@
             <p14:sldId id="269"/>
           </p14:sldIdLst>
         </p14:section>
-        <p14:section name="JIJ NU ! — Oefeningen" id="{30a6b1a9-e04a-810f-f711-4d65f549280d}">
+        <p14:section name="JIJ NU ! — Oefeningen" id="{55968f9c-acab-80af-f0f9-a1e7fe991849}">
           <p14:sldIdLst>
             <p14:sldId id="270"/>
             <p14:sldId id="271"/>
@@ -173,7 +173,7 @@
             <p14:sldId id="280"/>
           </p14:sldIdLst>
         </p14:section>
-        <p14:section name="Clôture" id="{3aa2e2a9-be5d-2076-99e0-d288c95dc4dc}">
+        <p14:section name="Clôture" id="{f61f09e7-a649-6417-d34e-3faec65cd25a}">
           <p14:sldIdLst>
             <p14:sldId id="281"/>
           </p14:sldIdLst>

--- a/neerlandais1/powerpoints/Module_9_Zinnen_verbinden.pptx
+++ b/neerlandais1/powerpoints/Module_9_Zinnen_verbinden.pptx
@@ -132,19 +132,19 @@
   <p:extLst>
     <p:ext uri="{521415D9-36F7-43E2-AB2F-B90AF26B5E84}">
       <p14:sectionLst xmlns:p14="http://schemas.microsoft.com/office/powerpoint/2010/main">
-        <p14:section name="Ouverture" id="{5bfdc3f8-8f29-b8af-bc40-be1f10d40ae2}">
+        <p14:section name="Ouverture" id="{bdbb5dff-25cb-45cf-c258-db440940c42b}">
           <p14:sldIdLst>
             <p14:sldId id="256"/>
           </p14:sldIdLst>
         </p14:section>
-        <p14:section name="Découvrir" id="{f47c38b3-982d-127e-9293-c38a01bf1ae6}">
+        <p14:section name="Découvrir" id="{af9e6d35-4542-d307-69b3-bc0ab58a9b4f}">
           <p14:sldIdLst>
             <p14:sldId id="257"/>
             <p14:sldId id="258"/>
             <p14:sldId id="259"/>
           </p14:sldIdLst>
         </p14:section>
-        <p14:section name="Comprendre" id="{3ff861a7-fc8a-9b53-b17e-9eacc4d44646}">
+        <p14:section name="Comprendre" id="{2c548d62-9ddf-77ab-fc03-547fc9e762fb}">
           <p14:sldIdLst>
             <p14:sldId id="260"/>
             <p14:sldId id="261"/>
@@ -158,7 +158,7 @@
             <p14:sldId id="269"/>
           </p14:sldIdLst>
         </p14:section>
-        <p14:section name="JIJ NU ! — Oefeningen" id="{55968f9c-acab-80af-f0f9-a1e7fe991849}">
+        <p14:section name="JIJ NU ! — Oefeningen" id="{e888563c-513d-d40b-19fd-6bfe52597083}">
           <p14:sldIdLst>
             <p14:sldId id="270"/>
             <p14:sldId id="271"/>
@@ -173,7 +173,7 @@
             <p14:sldId id="280"/>
           </p14:sldIdLst>
         </p14:section>
-        <p14:section name="Clôture" id="{f61f09e7-a649-6417-d34e-3faec65cd25a}">
+        <p14:section name="Clôture" id="{db4ad98b-1da5-ba90-af54-05c35a515b35}">
           <p14:sldIdLst>
             <p14:sldId id="281"/>
           </p14:sldIdLst>

--- a/neerlandais1/powerpoints/Module_9_Zinnen_verbinden.pptx
+++ b/neerlandais1/powerpoints/Module_9_Zinnen_verbinden.pptx
@@ -132,19 +132,19 @@
   <p:extLst>
     <p:ext uri="{521415D9-36F7-43E2-AB2F-B90AF26B5E84}">
       <p14:sectionLst xmlns:p14="http://schemas.microsoft.com/office/powerpoint/2010/main">
-        <p14:section name="Ouverture" id="{bdbb5dff-25cb-45cf-c258-db440940c42b}">
+        <p14:section name="Ouverture" id="{d7a2fd76-a965-3899-9086-f5a146ad4354}">
           <p14:sldIdLst>
             <p14:sldId id="256"/>
           </p14:sldIdLst>
         </p14:section>
-        <p14:section name="Découvrir" id="{af9e6d35-4542-d307-69b3-bc0ab58a9b4f}">
+        <p14:section name="Découvrir" id="{73eb5ce2-b765-82c1-e54d-0f21f1e5fe28}">
           <p14:sldIdLst>
             <p14:sldId id="257"/>
             <p14:sldId id="258"/>
             <p14:sldId id="259"/>
           </p14:sldIdLst>
         </p14:section>
-        <p14:section name="Comprendre" id="{2c548d62-9ddf-77ab-fc03-547fc9e762fb}">
+        <p14:section name="Comprendre" id="{7fc0c6df-ed59-efd3-6c61-8bafd9625df3}">
           <p14:sldIdLst>
             <p14:sldId id="260"/>
             <p14:sldId id="261"/>
@@ -158,7 +158,7 @@
             <p14:sldId id="269"/>
           </p14:sldIdLst>
         </p14:section>
-        <p14:section name="JIJ NU ! — Oefeningen" id="{e888563c-513d-d40b-19fd-6bfe52597083}">
+        <p14:section name="JIJ NU ! — Oefeningen" id="{ffc68c78-47be-4772-c8b4-382cffc1a394}">
           <p14:sldIdLst>
             <p14:sldId id="270"/>
             <p14:sldId id="271"/>
@@ -173,7 +173,7 @@
             <p14:sldId id="280"/>
           </p14:sldIdLst>
         </p14:section>
-        <p14:section name="Clôture" id="{db4ad98b-1da5-ba90-af54-05c35a515b35}">
+        <p14:section name="Clôture" id="{7c0a6837-349b-d2b8-8923-44362ff0d17c}">
           <p14:sldIdLst>
             <p14:sldId id="281"/>
           </p14:sldIdLst>
